--- a/exports/pptx/lessons/primary-module-06-moon-phases-tithi/day-03-house-visits.pptx
+++ b/exports/pptx/lessons/primary-module-06-moon-phases-tithi/day-03-house-visits.pptx
@@ -14,9 +14,11 @@
     <p:sldId id="262" r:id="rId8"/>
     <p:sldId id="263" r:id="rId9"/>
     <p:sldId id="264" r:id="rId10"/>
+    <p:sldId id="265" r:id="rId11"/>
+    <p:sldId id="266" r:id="rId12"/>
   </p:sldIdLst>
   <p:notesMasterIdLst>
-    <p:notesMasterId r:id="rId11"/>
+    <p:notesMasterId r:id="rId13"/>
   </p:notesMasterIdLst>
   <p:sldSz cx="9144000" cy="5143500"/>
   <p:notesSz cx="5143500" cy="9144000"/>
@@ -534,6 +536,182 @@
             <a:fld id="{F7021451-1387-4CA6-816F-3879F97B5CBC}" type="slidenum">
               <a:rPr lang="en-US"/>
               <a:t>1</a:t>
+            </a:fld>
+            <a:endParaRPr lang="en-US"/>
+          </a:p>
+        </p:txBody>
+      </p:sp>
+    </p:spTree>
+    <p:extLst>
+      <p:ext uri="{BB962C8B-B14F-4D97-AF65-F5344CB8AC3E}">
+        <p14:creationId xmlns:p14="http://schemas.microsoft.com/office/powerpoint/2010/main" val="1024086991"/>
+      </p:ext>
+    </p:extLst>
+  </p:cSld>
+  <p:clrMapOvr>
+    <a:masterClrMapping/>
+  </p:clrMapOvr>
+</p:notes>
+</file>
+
+<file path=ppt/notesSlides/notesSlide10.xml><?xml version="1.0" encoding="utf-8"?>
+<p:notes xmlns:a="http://schemas.openxmlformats.org/drawingml/2006/main" xmlns:r="http://schemas.openxmlformats.org/officeDocument/2006/relationships" xmlns:p="http://schemas.openxmlformats.org/presentationml/2006/main">
+  <p:cSld>
+    <p:spTree>
+      <p:nvGrpSpPr>
+        <p:cNvPr id="1" name=""/>
+        <p:cNvGrpSpPr/>
+        <p:nvPr/>
+      </p:nvGrpSpPr>
+      <p:grpSpPr>
+        <a:xfrm>
+          <a:off x="0" y="0"/>
+          <a:ext cx="0" cy="0"/>
+          <a:chOff x="0" y="0"/>
+          <a:chExt cx="0" cy="0"/>
+        </a:xfrm>
+      </p:grpSpPr>
+      <p:sp>
+        <p:nvSpPr>
+          <p:cNvPr id="2" name="Slide Image Placeholder 1"/>
+          <p:cNvSpPr>
+            <a:spLocks noGrp="1" noRot="1" noChangeAspect="1"/>
+          </p:cNvSpPr>
+          <p:nvPr>
+            <p:ph type="sldImg"/>
+          </p:nvPr>
+        </p:nvSpPr>
+        <p:spPr/>
+      </p:sp>
+      <p:sp>
+        <p:nvSpPr>
+          <p:cNvPr id="3" name="Notes Placeholder 2"/>
+          <p:cNvSpPr>
+            <a:spLocks noGrp="1"/>
+          </p:cNvSpPr>
+          <p:nvPr>
+            <p:ph type="body" idx="1"/>
+          </p:nvPr>
+        </p:nvSpPr>
+        <p:spPr/>
+        <p:txBody>
+          <a:bodyPr/>
+          <a:lstStyle/>
+          <a:p>
+            <a:r>
+              <a:rPr lang="en-US" dirty="0"/>
+              <a:t/>
+            </a:r>
+            <a:endParaRPr lang="en-US" dirty="0"/>
+          </a:p>
+        </p:txBody>
+      </p:sp>
+      <p:sp>
+        <p:nvSpPr>
+          <p:cNvPr id="4" name="Slide Number Placeholder 3"/>
+          <p:cNvSpPr>
+            <a:spLocks noGrp="1"/>
+          </p:cNvSpPr>
+          <p:nvPr>
+            <p:ph type="sldNum" sz="quarter" idx="10"/>
+          </p:nvPr>
+        </p:nvSpPr>
+        <p:spPr/>
+        <p:txBody>
+          <a:bodyPr/>
+          <a:lstStyle/>
+          <a:p>
+            <a:fld id="{F7021451-1387-4CA6-816F-3879F97B5CBC}" type="slidenum">
+              <a:rPr lang="en-US"/>
+              <a:t>10</a:t>
+            </a:fld>
+            <a:endParaRPr lang="en-US"/>
+          </a:p>
+        </p:txBody>
+      </p:sp>
+    </p:spTree>
+    <p:extLst>
+      <p:ext uri="{BB962C8B-B14F-4D97-AF65-F5344CB8AC3E}">
+        <p14:creationId xmlns:p14="http://schemas.microsoft.com/office/powerpoint/2010/main" val="1024086991"/>
+      </p:ext>
+    </p:extLst>
+  </p:cSld>
+  <p:clrMapOvr>
+    <a:masterClrMapping/>
+  </p:clrMapOvr>
+</p:notes>
+</file>
+
+<file path=ppt/notesSlides/notesSlide11.xml><?xml version="1.0" encoding="utf-8"?>
+<p:notes xmlns:a="http://schemas.openxmlformats.org/drawingml/2006/main" xmlns:r="http://schemas.openxmlformats.org/officeDocument/2006/relationships" xmlns:p="http://schemas.openxmlformats.org/presentationml/2006/main">
+  <p:cSld>
+    <p:spTree>
+      <p:nvGrpSpPr>
+        <p:cNvPr id="1" name=""/>
+        <p:cNvGrpSpPr/>
+        <p:nvPr/>
+      </p:nvGrpSpPr>
+      <p:grpSpPr>
+        <a:xfrm>
+          <a:off x="0" y="0"/>
+          <a:ext cx="0" cy="0"/>
+          <a:chOff x="0" y="0"/>
+          <a:chExt cx="0" cy="0"/>
+        </a:xfrm>
+      </p:grpSpPr>
+      <p:sp>
+        <p:nvSpPr>
+          <p:cNvPr id="2" name="Slide Image Placeholder 1"/>
+          <p:cNvSpPr>
+            <a:spLocks noGrp="1" noRot="1" noChangeAspect="1"/>
+          </p:cNvSpPr>
+          <p:nvPr>
+            <p:ph type="sldImg"/>
+          </p:nvPr>
+        </p:nvSpPr>
+        <p:spPr/>
+      </p:sp>
+      <p:sp>
+        <p:nvSpPr>
+          <p:cNvPr id="3" name="Notes Placeholder 2"/>
+          <p:cNvSpPr>
+            <a:spLocks noGrp="1"/>
+          </p:cNvSpPr>
+          <p:nvPr>
+            <p:ph type="body" idx="1"/>
+          </p:nvPr>
+        </p:nvSpPr>
+        <p:spPr/>
+        <p:txBody>
+          <a:bodyPr/>
+          <a:lstStyle/>
+          <a:p>
+            <a:r>
+              <a:rPr lang="en-US" dirty="0"/>
+              <a:t/>
+            </a:r>
+            <a:endParaRPr lang="en-US" dirty="0"/>
+          </a:p>
+        </p:txBody>
+      </p:sp>
+      <p:sp>
+        <p:nvSpPr>
+          <p:cNvPr id="4" name="Slide Number Placeholder 3"/>
+          <p:cNvSpPr>
+            <a:spLocks noGrp="1"/>
+          </p:cNvSpPr>
+          <p:nvPr>
+            <p:ph type="sldNum" sz="quarter" idx="10"/>
+          </p:nvPr>
+        </p:nvSpPr>
+        <p:spPr/>
+        <p:txBody>
+          <a:bodyPr/>
+          <a:lstStyle/>
+          <a:p>
+            <a:fld id="{F7021451-1387-4CA6-816F-3879F97B5CBC}" type="slidenum">
+              <a:rPr lang="en-US"/>
+              <a:t>11</a:t>
             </a:fld>
             <a:endParaRPr lang="en-US"/>
           </a:p>
@@ -1787,7 +1965,117 @@
         </p:nvSpPr>
         <p:spPr>
           <a:xfrm>
-            <a:off x="406301" y="1223963"/>
+            <a:off x="406301" y="4434929"/>
+            <a:ext cx="8498026" cy="213271"/>
+          </a:xfrm>
+          <a:prstGeom prst="rect">
+            <a:avLst/>
+          </a:prstGeom>
+          <a:noFill/>
+          <a:ln/>
+        </p:spPr>
+        <p:txBody>
+          <a:bodyPr wrap="square" lIns="0" tIns="0" rIns="0" bIns="0" rtlCol="0" anchor="t"/>
+          <a:lstStyle/>
+          <a:p>
+            <a:pPr algn="l" indent="0" marL="0">
+              <a:lnSpc>
+                <a:spcPts val="1680"/>
+              </a:lnSpc>
+              <a:spcBef>
+                <a:spcPts val="300"/>
+              </a:spcBef>
+              <a:spcAft>
+                <a:spcPts val="300"/>
+              </a:spcAft>
+              <a:buNone/>
+            </a:pPr>
+            <a:r>
+              <a:rPr lang="en-US" sz="1200" dirty="0">
+                <a:solidFill>
+                  <a:srgbClr val="2C2C2C"/>
+                </a:solidFill>
+                <a:latin typeface="Verdana" pitchFamily="34" charset="0"/>
+                <a:ea typeface="Verdana" pitchFamily="34" charset="-122"/>
+                <a:cs typeface="Verdana" pitchFamily="34" charset="-120"/>
+              </a:rPr>
+              <a:t>Primary ·  · IKS Curriculum</a:t>
+            </a:r>
+            <a:endParaRPr lang="en-US" sz="1200" dirty="0"/>
+          </a:p>
+        </p:txBody>
+      </p:sp>
+    </p:spTree>
+  </p:cSld>
+  <p:clrMapOvr>
+    <a:masterClrMapping/>
+  </p:clrMapOvr>
+</p:sld>
+</file>
+
+<file path=ppt/slides/slide10.xml><?xml version="1.0" encoding="utf-8"?>
+<p:sld xmlns:a="http://schemas.openxmlformats.org/drawingml/2006/main" xmlns:r="http://schemas.openxmlformats.org/officeDocument/2006/relationships" xmlns:p="http://schemas.openxmlformats.org/presentationml/2006/main">
+  <p:cSld name="Slide 10">
+    <p:bg>
+      <p:bgPr>
+        <a:solidFill>
+          <a:srgbClr val="FAF7F2"/>
+        </a:solidFill>
+      </p:bgPr>
+    </p:bg>
+    <p:spTree>
+      <p:nvGrpSpPr>
+        <p:cNvPr id="1" name=""/>
+        <p:cNvGrpSpPr/>
+        <p:nvPr/>
+      </p:nvGrpSpPr>
+      <p:grpSpPr>
+        <a:xfrm>
+          <a:off x="0" y="0"/>
+          <a:ext cx="0" cy="0"/>
+          <a:chOff x="0" y="0"/>
+          <a:chExt cx="0" cy="0"/>
+        </a:xfrm>
+      </p:grpSpPr>
+      <p:sp>
+        <p:nvSpPr>
+          <p:cNvPr id="2" name="Text 0"/>
+          <p:cNvSpPr/>
+          <p:nvPr/>
+        </p:nvSpPr>
+        <p:spPr>
+          <a:xfrm>
+            <a:off x="0" y="0"/>
+            <a:ext cx="9144000" cy="101501"/>
+          </a:xfrm>
+          <a:prstGeom prst="rect">
+            <a:avLst/>
+          </a:prstGeom>
+          <a:solidFill>
+            <a:srgbClr val="87A96B"/>
+          </a:solidFill>
+          <a:ln/>
+        </p:spPr>
+        <p:txBody>
+          <a:bodyPr wrap="square" rtlCol="0" anchor="ctr"/>
+          <a:lstStyle/>
+          <a:p>
+            <a:pPr indent="0" marL="0">
+              <a:buNone/>
+            </a:pPr>
+            <a:endParaRPr lang="en-US" dirty="0"/>
+          </a:p>
+        </p:txBody>
+      </p:sp>
+      <p:sp>
+        <p:nvSpPr>
+          <p:cNvPr id="3" name="Text 1"/>
+          <p:cNvSpPr/>
+          <p:nvPr/>
+        </p:nvSpPr>
+        <p:spPr>
+          <a:xfrm>
+            <a:off x="406301" y="457051"/>
             <a:ext cx="8498026" cy="274290"/>
           </a:xfrm>
           <a:prstGeom prst="rect">
@@ -1821,7 +2109,7 @@
                 <a:ea typeface="Georgia" pitchFamily="34" charset="-122"/>
                 <a:cs typeface="Georgia" pitchFamily="34" charset="-120"/>
               </a:rPr>
-              <a:t>Goal</a:t>
+              <a:t>Teacher's quick notes</a:t>
             </a:r>
             <a:endParaRPr lang="en-US" sz="1800" dirty="0"/>
           </a:p>
@@ -1829,14 +2117,14 @@
       </p:sp>
       <p:sp>
         <p:nvSpPr>
-          <p:cNvPr id="6" name="Text 4"/>
+          <p:cNvPr id="4" name="Text 2"/>
           <p:cNvSpPr/>
           <p:nvPr/>
         </p:nvSpPr>
         <p:spPr>
           <a:xfrm>
-            <a:off x="406301" y="1637854"/>
-            <a:ext cx="8498026" cy="426541"/>
+            <a:off x="634901" y="883593"/>
+            <a:ext cx="8102798" cy="1797844"/>
           </a:xfrm>
           <a:prstGeom prst="rect">
             <a:avLst/>
@@ -1848,6 +2136,260 @@
           <a:bodyPr wrap="square" lIns="0" tIns="0" rIns="0" bIns="0" rtlCol="0" anchor="t"/>
           <a:lstStyle/>
           <a:p>
+            <a:pPr algn="l" marL="342900" indent="-342900">
+              <a:lnSpc>
+                <a:spcPts val="1620"/>
+              </a:lnSpc>
+              <a:spcAft>
+                <a:spcPts val="300"/>
+              </a:spcAft>
+              <a:buSzPct val="100000"/>
+              <a:buChar char="•"/>
+            </a:pPr>
+            <a:r>
+              <a:rPr lang="en-US" sz="1200" dirty="0">
+                <a:solidFill>
+                  <a:srgbClr val="2C2C2C"/>
+                </a:solidFill>
+                <a:latin typeface="Verdana" pitchFamily="34" charset="0"/>
+                <a:ea typeface="Verdana" pitchFamily="34" charset="-122"/>
+                <a:cs typeface="Verdana" pitchFamily="34" charset="-120"/>
+              </a:rPr>
+              <a:t>The "27 sisters" framing is a teaching tool drawing on traditional stories (the Dakṣa's daughters narrative appears in several </a:t>
+            </a:r>
+            <a:pPr algn="l" indent="0" marL="0">
+              <a:lnSpc>
+                <a:spcPts val="1620"/>
+              </a:lnSpc>
+              <a:spcAft>
+                <a:spcPts val="300"/>
+              </a:spcAft>
+              <a:buNone/>
+            </a:pPr>
+            <a:r>
+              <a:rPr lang="en-US" sz="1200" i="1" dirty="0">
+                <a:solidFill>
+                  <a:srgbClr val="2C2C2C"/>
+                </a:solidFill>
+                <a:latin typeface="Verdana" pitchFamily="34" charset="0"/>
+                <a:ea typeface="Verdana" pitchFamily="34" charset="-122"/>
+                <a:cs typeface="Verdana" pitchFamily="34" charset="-120"/>
+              </a:rPr>
+              <a:t>Purāṇa</a:t>
+            </a:r>
+            <a:pPr algn="l" indent="0" marL="0">
+              <a:lnSpc>
+                <a:spcPts val="1620"/>
+              </a:lnSpc>
+              <a:spcAft>
+                <a:spcPts val="300"/>
+              </a:spcAft>
+              <a:buNone/>
+            </a:pPr>
+            <a:r>
+              <a:rPr lang="en-US" sz="1200" dirty="0">
+                <a:solidFill>
+                  <a:srgbClr val="2C2C2C"/>
+                </a:solidFill>
+                <a:latin typeface="Verdana" pitchFamily="34" charset="0"/>
+                <a:ea typeface="Verdana" pitchFamily="34" charset="-122"/>
+                <a:cs typeface="Verdana" pitchFamily="34" charset="-120"/>
+              </a:rPr>
+              <a:t>s, with the Moon as </a:t>
+            </a:r>
+            <a:pPr algn="l" indent="0" marL="0">
+              <a:lnSpc>
+                <a:spcPts val="1620"/>
+              </a:lnSpc>
+              <a:spcAft>
+                <a:spcPts val="300"/>
+              </a:spcAft>
+              <a:buNone/>
+            </a:pPr>
+            <a:r>
+              <a:rPr lang="en-US" sz="1200" i="1" dirty="0">
+                <a:solidFill>
+                  <a:srgbClr val="2C2C2C"/>
+                </a:solidFill>
+                <a:latin typeface="Verdana" pitchFamily="34" charset="0"/>
+                <a:ea typeface="Verdana" pitchFamily="34" charset="-122"/>
+                <a:cs typeface="Verdana" pitchFamily="34" charset="-120"/>
+              </a:rPr>
+              <a:t>Soma</a:t>
+            </a:r>
+            <a:pPr algn="l" indent="0" marL="0">
+              <a:lnSpc>
+                <a:spcPts val="1620"/>
+              </a:lnSpc>
+              <a:spcAft>
+                <a:spcPts val="300"/>
+              </a:spcAft>
+              <a:buNone/>
+            </a:pPr>
+            <a:r>
+              <a:rPr lang="en-US" sz="1200" dirty="0">
+                <a:solidFill>
+                  <a:srgbClr val="2C2C2C"/>
+                </a:solidFill>
+                <a:latin typeface="Verdana" pitchFamily="34" charset="0"/>
+                <a:ea typeface="Verdana" pitchFamily="34" charset="-122"/>
+                <a:cs typeface="Verdana" pitchFamily="34" charset="-120"/>
+              </a:rPr>
+              <a:t> / Candra). At Primary band, frame it as "an old story" — don't claim a single canonical source.</a:t>
+            </a:r>
+            <a:endParaRPr lang="en-US" sz="1200" dirty="0"/>
+          </a:p>
+          <a:p>
+            <a:pPr algn="l" marL="342900" indent="-342900">
+              <a:lnSpc>
+                <a:spcPts val="1620"/>
+              </a:lnSpc>
+              <a:spcAft>
+                <a:spcPts val="300"/>
+              </a:spcAft>
+              <a:buSzPct val="100000"/>
+              <a:buChar char="•"/>
+            </a:pPr>
+            <a:r>
+              <a:rPr lang="en-US" sz="1200" dirty="0">
+                <a:solidFill>
+                  <a:srgbClr val="2C2C2C"/>
+                </a:solidFill>
+                <a:latin typeface="Verdana" pitchFamily="34" charset="0"/>
+                <a:ea typeface="Verdana" pitchFamily="34" charset="-122"/>
+                <a:cs typeface="Verdana" pitchFamily="34" charset="-120"/>
+              </a:rPr>
+              <a:t>The point: children learn that the Moon's position in the sky changes night by night, in a 27-night cycle (the </a:t>
+            </a:r>
+            <a:pPr algn="l" indent="0" marL="0">
+              <a:lnSpc>
+                <a:spcPts val="1620"/>
+              </a:lnSpc>
+              <a:spcAft>
+                <a:spcPts val="300"/>
+              </a:spcAft>
+              <a:buNone/>
+            </a:pPr>
+            <a:r>
+              <a:rPr lang="en-US" sz="1200" i="1" dirty="0">
+                <a:solidFill>
+                  <a:srgbClr val="2C2C2C"/>
+                </a:solidFill>
+                <a:latin typeface="Verdana" pitchFamily="34" charset="0"/>
+                <a:ea typeface="Verdana" pitchFamily="34" charset="-122"/>
+                <a:cs typeface="Verdana" pitchFamily="34" charset="-120"/>
+              </a:rPr>
+              <a:t>sidereal</a:t>
+            </a:r>
+            <a:pPr algn="l" indent="0" marL="0">
+              <a:lnSpc>
+                <a:spcPts val="1620"/>
+              </a:lnSpc>
+              <a:spcAft>
+                <a:spcPts val="300"/>
+              </a:spcAft>
+              <a:buNone/>
+            </a:pPr>
+            <a:r>
+              <a:rPr lang="en-US" sz="1200" dirty="0">
+                <a:solidFill>
+                  <a:srgbClr val="2C2C2C"/>
+                </a:solidFill>
+                <a:latin typeface="Verdana" pitchFamily="34" charset="0"/>
+                <a:ea typeface="Verdana" pitchFamily="34" charset="-122"/>
+                <a:cs typeface="Verdana" pitchFamily="34" charset="-120"/>
+              </a:rPr>
+              <a:t> month — different from the 30-day </a:t>
+            </a:r>
+            <a:pPr algn="l" indent="0" marL="0">
+              <a:lnSpc>
+                <a:spcPts val="1620"/>
+              </a:lnSpc>
+              <a:spcAft>
+                <a:spcPts val="300"/>
+              </a:spcAft>
+              <a:buNone/>
+            </a:pPr>
+            <a:r>
+              <a:rPr lang="en-US" sz="1200" i="1" dirty="0">
+                <a:solidFill>
+                  <a:srgbClr val="2C2C2C"/>
+                </a:solidFill>
+                <a:latin typeface="Verdana" pitchFamily="34" charset="0"/>
+                <a:ea typeface="Verdana" pitchFamily="34" charset="-122"/>
+                <a:cs typeface="Verdana" pitchFamily="34" charset="-120"/>
+              </a:rPr>
+              <a:t>synodic</a:t>
+            </a:r>
+            <a:pPr algn="l" indent="0" marL="0">
+              <a:lnSpc>
+                <a:spcPts val="1620"/>
+              </a:lnSpc>
+              <a:spcAft>
+                <a:spcPts val="300"/>
+              </a:spcAft>
+              <a:buNone/>
+            </a:pPr>
+            <a:r>
+              <a:rPr lang="en-US" sz="1200" dirty="0">
+                <a:solidFill>
+                  <a:srgbClr val="2C2C2C"/>
+                </a:solidFill>
+                <a:latin typeface="Verdana" pitchFamily="34" charset="0"/>
+                <a:ea typeface="Verdana" pitchFamily="34" charset="-122"/>
+                <a:cs typeface="Verdana" pitchFamily="34" charset="-120"/>
+              </a:rPr>
+              <a:t> month, but we don't need that distinction yet).</a:t>
+            </a:r>
+            <a:endParaRPr lang="en-US" sz="1200" dirty="0"/>
+          </a:p>
+          <a:p>
+            <a:pPr algn="l" marL="342900" indent="-342900">
+              <a:lnSpc>
+                <a:spcPts val="1620"/>
+              </a:lnSpc>
+              <a:spcAft>
+                <a:spcPts val="300"/>
+              </a:spcAft>
+              <a:buSzPct val="100000"/>
+              <a:buChar char="•"/>
+            </a:pPr>
+            <a:r>
+              <a:rPr lang="en-US" sz="1200" dirty="0">
+                <a:solidFill>
+                  <a:srgbClr val="2C2C2C"/>
+                </a:solidFill>
+                <a:latin typeface="Verdana" pitchFamily="34" charset="0"/>
+                <a:ea typeface="Verdana" pitchFamily="34" charset="-122"/>
+                <a:cs typeface="Verdana" pitchFamily="34" charset="-120"/>
+              </a:rPr>
+              <a:t>If a child asks "why don't the houses come back to the same place every 30 nights?" — that's a great question, and you can tell them they'll learn about it in Middle school. (The answer: because Earth has moved around the Sun during the 27 days too.)</a:t>
+            </a:r>
+            <a:endParaRPr lang="en-US" sz="1200" dirty="0"/>
+          </a:p>
+        </p:txBody>
+      </p:sp>
+      <p:sp>
+        <p:nvSpPr>
+          <p:cNvPr id="5" name="Text 3"/>
+          <p:cNvSpPr/>
+          <p:nvPr/>
+        </p:nvSpPr>
+        <p:spPr>
+          <a:xfrm>
+            <a:off x="406301" y="4434929"/>
+            <a:ext cx="8498026" cy="213271"/>
+          </a:xfrm>
+          <a:prstGeom prst="rect">
+            <a:avLst/>
+          </a:prstGeom>
+          <a:noFill/>
+          <a:ln/>
+        </p:spPr>
+        <p:txBody>
+          <a:bodyPr wrap="square" lIns="0" tIns="0" rIns="0" bIns="0" rtlCol="0" anchor="t"/>
+          <a:lstStyle/>
+          <a:p>
             <a:pPr algn="l" indent="0" marL="0">
               <a:lnSpc>
                 <a:spcPts val="1680"/>
@@ -1869,42 +2411,152 @@
                 <a:ea typeface="Verdana" pitchFamily="34" charset="-122"/>
                 <a:cs typeface="Verdana" pitchFamily="34" charset="-120"/>
               </a:rPr>
-              <a:t>Children meet the idea that the Moon visits a different "house" (star pattern) every night — a folktale-style framing of the 27 </a:t>
-            </a:r>
-            <a:pPr algn="l" indent="0" marL="0">
-              <a:lnSpc>
-                <a:spcPts val="1680"/>
+              <a:t>Primary ·  · IKS Curriculum</a:t>
+            </a:r>
+            <a:endParaRPr lang="en-US" sz="1200" dirty="0"/>
+          </a:p>
+        </p:txBody>
+      </p:sp>
+    </p:spTree>
+  </p:cSld>
+  <p:clrMapOvr>
+    <a:masterClrMapping/>
+  </p:clrMapOvr>
+</p:sld>
+</file>
+
+<file path=ppt/slides/slide11.xml><?xml version="1.0" encoding="utf-8"?>
+<p:sld xmlns:a="http://schemas.openxmlformats.org/drawingml/2006/main" xmlns:r="http://schemas.openxmlformats.org/officeDocument/2006/relationships" xmlns:p="http://schemas.openxmlformats.org/presentationml/2006/main">
+  <p:cSld name="Slide 11">
+    <p:bg>
+      <p:bgPr>
+        <a:solidFill>
+          <a:srgbClr val="FAF7F2"/>
+        </a:solidFill>
+      </p:bgPr>
+    </p:bg>
+    <p:spTree>
+      <p:nvGrpSpPr>
+        <p:cNvPr id="1" name=""/>
+        <p:cNvGrpSpPr/>
+        <p:nvPr/>
+      </p:nvGrpSpPr>
+      <p:grpSpPr>
+        <a:xfrm>
+          <a:off x="0" y="0"/>
+          <a:ext cx="0" cy="0"/>
+          <a:chOff x="0" y="0"/>
+          <a:chExt cx="0" cy="0"/>
+        </a:xfrm>
+      </p:grpSpPr>
+      <p:sp>
+        <p:nvSpPr>
+          <p:cNvPr id="2" name="Text 0"/>
+          <p:cNvSpPr/>
+          <p:nvPr/>
+        </p:nvSpPr>
+        <p:spPr>
+          <a:xfrm>
+            <a:off x="0" y="0"/>
+            <a:ext cx="9144000" cy="101501"/>
+          </a:xfrm>
+          <a:prstGeom prst="rect">
+            <a:avLst/>
+          </a:prstGeom>
+          <a:solidFill>
+            <a:srgbClr val="87A96B"/>
+          </a:solidFill>
+          <a:ln/>
+        </p:spPr>
+        <p:txBody>
+          <a:bodyPr wrap="square" rtlCol="0" anchor="ctr"/>
+          <a:lstStyle/>
+          <a:p>
+            <a:pPr indent="0" marL="0">
+              <a:buNone/>
+            </a:pPr>
+            <a:endParaRPr lang="en-US" dirty="0"/>
+          </a:p>
+        </p:txBody>
+      </p:sp>
+      <p:sp>
+        <p:nvSpPr>
+          <p:cNvPr id="3" name="Text 1"/>
+          <p:cNvSpPr/>
+          <p:nvPr/>
+        </p:nvSpPr>
+        <p:spPr>
+          <a:xfrm>
+            <a:off x="406301" y="457051"/>
+            <a:ext cx="8498026" cy="274290"/>
+          </a:xfrm>
+          <a:prstGeom prst="rect">
+            <a:avLst/>
+          </a:prstGeom>
+          <a:noFill/>
+          <a:ln/>
+        </p:spPr>
+        <p:txBody>
+          <a:bodyPr wrap="square" lIns="0" tIns="0" rIns="0" bIns="0" rtlCol="0" anchor="t"/>
+          <a:lstStyle/>
+          <a:p>
+            <a:pPr algn="l" indent="0" marL="0">
+              <a:lnSpc>
+                <a:spcPts val="2160"/>
               </a:lnSpc>
               <a:spcBef>
-                <a:spcPts val="300"/>
+                <a:spcPts val="600"/>
               </a:spcBef>
               <a:spcAft>
-                <a:spcPts val="300"/>
-              </a:spcAft>
-              <a:buNone/>
-            </a:pPr>
-            <a:r>
-              <a:rPr lang="en-US" sz="1200" i="1" dirty="0">
-                <a:solidFill>
-                  <a:srgbClr val="2C2C2C"/>
-                </a:solidFill>
-                <a:latin typeface="Verdana" pitchFamily="34" charset="0"/>
-                <a:ea typeface="Verdana" pitchFamily="34" charset="-122"/>
-                <a:cs typeface="Verdana" pitchFamily="34" charset="-120"/>
-              </a:rPr>
-              <a:t>nakṣatra</a:t>
-            </a:r>
-            <a:pPr algn="l" indent="0" marL="0">
-              <a:lnSpc>
-                <a:spcPts val="1680"/>
-              </a:lnSpc>
-              <a:spcBef>
-                <a:spcPts val="300"/>
-              </a:spcBef>
-              <a:spcAft>
-                <a:spcPts val="300"/>
-              </a:spcAft>
-              <a:buNone/>
+                <a:spcPts val="800"/>
+              </a:spcAft>
+              <a:buNone/>
+            </a:pPr>
+            <a:r>
+              <a:rPr lang="en-US" sz="1800" b="1" dirty="0">
+                <a:solidFill>
+                  <a:srgbClr val="E07A5F"/>
+                </a:solidFill>
+                <a:latin typeface="Georgia" pitchFamily="34" charset="0"/>
+                <a:ea typeface="Georgia" pitchFamily="34" charset="-122"/>
+                <a:cs typeface="Georgia" pitchFamily="34" charset="-120"/>
+              </a:rPr>
+              <a:t>Teacher's quick notes (cont.)</a:t>
+            </a:r>
+            <a:endParaRPr lang="en-US" sz="1800" dirty="0"/>
+          </a:p>
+        </p:txBody>
+      </p:sp>
+      <p:sp>
+        <p:nvSpPr>
+          <p:cNvPr id="4" name="Text 2"/>
+          <p:cNvSpPr/>
+          <p:nvPr/>
+        </p:nvSpPr>
+        <p:spPr>
+          <a:xfrm>
+            <a:off x="634901" y="883593"/>
+            <a:ext cx="8102798" cy="487561"/>
+          </a:xfrm>
+          <a:prstGeom prst="rect">
+            <a:avLst/>
+          </a:prstGeom>
+          <a:noFill/>
+          <a:ln/>
+        </p:spPr>
+        <p:txBody>
+          <a:bodyPr wrap="square" lIns="0" tIns="0" rIns="0" bIns="0" rtlCol="0" anchor="t"/>
+          <a:lstStyle/>
+          <a:p>
+            <a:pPr algn="l" marL="342900" indent="-342900">
+              <a:lnSpc>
+                <a:spcPts val="1620"/>
+              </a:lnSpc>
+              <a:spcAft>
+                <a:spcPts val="300"/>
+              </a:spcAft>
+              <a:buSzPct val="100000"/>
+              <a:buChar char="•"/>
             </a:pPr>
             <a:r>
               <a:rPr lang="en-US" sz="1200" dirty="0">
@@ -1915,53 +2567,7 @@
                 <a:ea typeface="Verdana" pitchFamily="34" charset="-122"/>
                 <a:cs typeface="Verdana" pitchFamily="34" charset="-120"/>
               </a:rPr>
-              <a:t>s. The Sanskrit word </a:t>
-            </a:r>
-            <a:pPr algn="l" indent="0" marL="0">
-              <a:lnSpc>
-                <a:spcPts val="1680"/>
-              </a:lnSpc>
-              <a:spcBef>
-                <a:spcPts val="300"/>
-              </a:spcBef>
-              <a:spcAft>
-                <a:spcPts val="300"/>
-              </a:spcAft>
-              <a:buNone/>
-            </a:pPr>
-            <a:r>
-              <a:rPr lang="en-US" sz="1200" i="1" dirty="0">
-                <a:solidFill>
-                  <a:srgbClr val="2C2C2C"/>
-                </a:solidFill>
-                <a:latin typeface="Verdana" pitchFamily="34" charset="0"/>
-                <a:ea typeface="Verdana" pitchFamily="34" charset="-122"/>
-                <a:cs typeface="Verdana" pitchFamily="34" charset="-120"/>
-              </a:rPr>
-              <a:t>nakṣatra</a:t>
-            </a:r>
-            <a:pPr algn="l" indent="0" marL="0">
-              <a:lnSpc>
-                <a:spcPts val="1680"/>
-              </a:lnSpc>
-              <a:spcBef>
-                <a:spcPts val="300"/>
-              </a:spcBef>
-              <a:spcAft>
-                <a:spcPts val="300"/>
-              </a:spcAft>
-              <a:buNone/>
-            </a:pPr>
-            <a:r>
-              <a:rPr lang="en-US" sz="1200" dirty="0">
-                <a:solidFill>
-                  <a:srgbClr val="2C2C2C"/>
-                </a:solidFill>
-                <a:latin typeface="Verdana" pitchFamily="34" charset="0"/>
-                <a:ea typeface="Verdana" pitchFamily="34" charset="-122"/>
-                <a:cs typeface="Verdana" pitchFamily="34" charset="-120"/>
-              </a:rPr>
-              <a:t> is introduced softly without drilling.</a:t>
+              <a:t>Some children may know specific nakṣatras from their birth chart. That's fine — let them share, but don't dwell on astrology.</a:t>
             </a:r>
             <a:endParaRPr lang="en-US" sz="1200" dirty="0"/>
           </a:p>
@@ -1969,7 +2575,7 @@
       </p:sp>
       <p:sp>
         <p:nvSpPr>
-          <p:cNvPr id="7" name="Text 5"/>
+          <p:cNvPr id="5" name="Text 3"/>
           <p:cNvSpPr/>
           <p:nvPr/>
         </p:nvSpPr>
@@ -2119,7 +2725,7 @@
                 <a:ea typeface="Georgia" pitchFamily="34" charset="-122"/>
                 <a:cs typeface="Georgia" pitchFamily="34" charset="-120"/>
               </a:rPr>
-              <a:t>Materials</a:t>
+              <a:t>Goal</a:t>
             </a:r>
             <a:endParaRPr lang="en-US" sz="1800" dirty="0"/>
           </a:p>
@@ -2167,7 +2773,99 @@
                 <a:ea typeface="Verdana" pitchFamily="34" charset="-122"/>
                 <a:cs typeface="Verdana" pitchFamily="34" charset="-120"/>
               </a:rPr>
-              <a:t>– A printed Moon and 27 paper "house" stars arranged in a circle on the floor (or on a wall poster) – Drawing paper</a:t>
+              <a:t>Children meet the idea that the Moon visits a different "house" (star pattern) every night — a folktale-style framing of the 27 </a:t>
+            </a:r>
+            <a:pPr algn="l" indent="0" marL="0">
+              <a:lnSpc>
+                <a:spcPts val="1680"/>
+              </a:lnSpc>
+              <a:spcBef>
+                <a:spcPts val="300"/>
+              </a:spcBef>
+              <a:spcAft>
+                <a:spcPts val="300"/>
+              </a:spcAft>
+              <a:buNone/>
+            </a:pPr>
+            <a:r>
+              <a:rPr lang="en-US" sz="1200" i="1" dirty="0">
+                <a:solidFill>
+                  <a:srgbClr val="2C2C2C"/>
+                </a:solidFill>
+                <a:latin typeface="Verdana" pitchFamily="34" charset="0"/>
+                <a:ea typeface="Verdana" pitchFamily="34" charset="-122"/>
+                <a:cs typeface="Verdana" pitchFamily="34" charset="-120"/>
+              </a:rPr>
+              <a:t>nakṣatra</a:t>
+            </a:r>
+            <a:pPr algn="l" indent="0" marL="0">
+              <a:lnSpc>
+                <a:spcPts val="1680"/>
+              </a:lnSpc>
+              <a:spcBef>
+                <a:spcPts val="300"/>
+              </a:spcBef>
+              <a:spcAft>
+                <a:spcPts val="300"/>
+              </a:spcAft>
+              <a:buNone/>
+            </a:pPr>
+            <a:r>
+              <a:rPr lang="en-US" sz="1200" dirty="0">
+                <a:solidFill>
+                  <a:srgbClr val="2C2C2C"/>
+                </a:solidFill>
+                <a:latin typeface="Verdana" pitchFamily="34" charset="0"/>
+                <a:ea typeface="Verdana" pitchFamily="34" charset="-122"/>
+                <a:cs typeface="Verdana" pitchFamily="34" charset="-120"/>
+              </a:rPr>
+              <a:t>s. The Sanskrit word </a:t>
+            </a:r>
+            <a:pPr algn="l" indent="0" marL="0">
+              <a:lnSpc>
+                <a:spcPts val="1680"/>
+              </a:lnSpc>
+              <a:spcBef>
+                <a:spcPts val="300"/>
+              </a:spcBef>
+              <a:spcAft>
+                <a:spcPts val="300"/>
+              </a:spcAft>
+              <a:buNone/>
+            </a:pPr>
+            <a:r>
+              <a:rPr lang="en-US" sz="1200" i="1" dirty="0">
+                <a:solidFill>
+                  <a:srgbClr val="2C2C2C"/>
+                </a:solidFill>
+                <a:latin typeface="Verdana" pitchFamily="34" charset="0"/>
+                <a:ea typeface="Verdana" pitchFamily="34" charset="-122"/>
+                <a:cs typeface="Verdana" pitchFamily="34" charset="-120"/>
+              </a:rPr>
+              <a:t>nakṣatra</a:t>
+            </a:r>
+            <a:pPr algn="l" indent="0" marL="0">
+              <a:lnSpc>
+                <a:spcPts val="1680"/>
+              </a:lnSpc>
+              <a:spcBef>
+                <a:spcPts val="300"/>
+              </a:spcBef>
+              <a:spcAft>
+                <a:spcPts val="300"/>
+              </a:spcAft>
+              <a:buNone/>
+            </a:pPr>
+            <a:r>
+              <a:rPr lang="en-US" sz="1200" dirty="0">
+                <a:solidFill>
+                  <a:srgbClr val="2C2C2C"/>
+                </a:solidFill>
+                <a:latin typeface="Verdana" pitchFamily="34" charset="0"/>
+                <a:ea typeface="Verdana" pitchFamily="34" charset="-122"/>
+                <a:cs typeface="Verdana" pitchFamily="34" charset="-120"/>
+              </a:rPr>
+              <a:t> is introduced softly without drilling.</a:t>
             </a:r>
             <a:endParaRPr lang="en-US" sz="1200" dirty="0"/>
           </a:p>
@@ -2325,7 +3023,7 @@
                 <a:ea typeface="Georgia" pitchFamily="34" charset="-122"/>
                 <a:cs typeface="Georgia" pitchFamily="34" charset="-120"/>
               </a:rPr>
-              <a:t>The flow</a:t>
+              <a:t>Materials</a:t>
             </a:r>
             <a:endParaRPr lang="en-US" sz="1800" dirty="0"/>
           </a:p>
@@ -2334,6 +3032,76 @@
       <p:sp>
         <p:nvSpPr>
           <p:cNvPr id="4" name="Text 2"/>
+          <p:cNvSpPr/>
+          <p:nvPr/>
+        </p:nvSpPr>
+        <p:spPr>
+          <a:xfrm>
+            <a:off x="634901" y="883593"/>
+            <a:ext cx="8102798" cy="525661"/>
+          </a:xfrm>
+          <a:prstGeom prst="rect">
+            <a:avLst/>
+          </a:prstGeom>
+          <a:noFill/>
+          <a:ln/>
+        </p:spPr>
+        <p:txBody>
+          <a:bodyPr wrap="square" lIns="0" tIns="0" rIns="0" bIns="0" rtlCol="0" anchor="t"/>
+          <a:lstStyle/>
+          <a:p>
+            <a:pPr algn="l" marL="342900" indent="-342900">
+              <a:lnSpc>
+                <a:spcPts val="1620"/>
+              </a:lnSpc>
+              <a:spcAft>
+                <a:spcPts val="300"/>
+              </a:spcAft>
+              <a:buSzPct val="100000"/>
+              <a:buChar char="•"/>
+            </a:pPr>
+            <a:r>
+              <a:rPr lang="en-US" sz="1200" dirty="0">
+                <a:solidFill>
+                  <a:srgbClr val="2C2C2C"/>
+                </a:solidFill>
+                <a:latin typeface="Verdana" pitchFamily="34" charset="0"/>
+                <a:ea typeface="Verdana" pitchFamily="34" charset="-122"/>
+                <a:cs typeface="Verdana" pitchFamily="34" charset="-120"/>
+              </a:rPr>
+              <a:t>A printed Moon and 27 paper "house" stars arranged in a circle on the floor (or on a wall poster)</a:t>
+            </a:r>
+            <a:endParaRPr lang="en-US" sz="1200" dirty="0"/>
+          </a:p>
+          <a:p>
+            <a:pPr algn="l" marL="342900" indent="-342900">
+              <a:lnSpc>
+                <a:spcPts val="1620"/>
+              </a:lnSpc>
+              <a:spcAft>
+                <a:spcPts val="300"/>
+              </a:spcAft>
+              <a:buSzPct val="100000"/>
+              <a:buChar char="•"/>
+            </a:pPr>
+            <a:r>
+              <a:rPr lang="en-US" sz="1200" dirty="0">
+                <a:solidFill>
+                  <a:srgbClr val="2C2C2C"/>
+                </a:solidFill>
+                <a:latin typeface="Verdana" pitchFamily="34" charset="0"/>
+                <a:ea typeface="Verdana" pitchFamily="34" charset="-122"/>
+                <a:cs typeface="Verdana" pitchFamily="34" charset="-120"/>
+              </a:rPr>
+              <a:t>Drawing paper</a:t>
+            </a:r>
+            <a:endParaRPr lang="en-US" sz="1200" dirty="0"/>
+          </a:p>
+        </p:txBody>
+      </p:sp>
+      <p:sp>
+        <p:nvSpPr>
+          <p:cNvPr id="5" name="Text 3"/>
           <p:cNvSpPr/>
           <p:nvPr/>
         </p:nvSpPr>
@@ -2483,7 +3251,7 @@
                 <a:ea typeface="Georgia" pitchFamily="34" charset="-122"/>
                 <a:cs typeface="Georgia" pitchFamily="34" charset="-120"/>
               </a:rPr>
-              <a:t>Settle + recall (3 min)</a:t>
+              <a:t>The flow</a:t>
             </a:r>
             <a:endParaRPr lang="en-US" sz="1800" dirty="0"/>
           </a:p>
@@ -2492,194 +3260,6 @@
       <p:sp>
         <p:nvSpPr>
           <p:cNvPr id="4" name="Text 2"/>
-          <p:cNvSpPr/>
-          <p:nvPr/>
-        </p:nvSpPr>
-        <p:spPr>
-          <a:xfrm>
-            <a:off x="406301" y="870942"/>
-            <a:ext cx="8498026" cy="213271"/>
-          </a:xfrm>
-          <a:prstGeom prst="rect">
-            <a:avLst/>
-          </a:prstGeom>
-          <a:noFill/>
-          <a:ln/>
-        </p:spPr>
-        <p:txBody>
-          <a:bodyPr wrap="square" lIns="0" tIns="0" rIns="0" bIns="0" rtlCol="0" anchor="t"/>
-          <a:lstStyle/>
-          <a:p>
-            <a:pPr algn="l" indent="0" marL="0">
-              <a:lnSpc>
-                <a:spcPts val="1680"/>
-              </a:lnSpc>
-              <a:spcBef>
-                <a:spcPts val="300"/>
-              </a:spcBef>
-              <a:spcAft>
-                <a:spcPts val="300"/>
-              </a:spcAft>
-              <a:buNone/>
-            </a:pPr>
-            <a:r>
-              <a:rPr lang="en-US" sz="1200" dirty="0">
-                <a:solidFill>
-                  <a:srgbClr val="2C2C2C"/>
-                </a:solidFill>
-                <a:latin typeface="Verdana" pitchFamily="34" charset="0"/>
-                <a:ea typeface="Verdana" pitchFamily="34" charset="-122"/>
-                <a:cs typeface="Verdana" pitchFamily="34" charset="-120"/>
-              </a:rPr>
-              <a:t>Chant: </a:t>
-            </a:r>
-            <a:pPr algn="l" indent="0" marL="0">
-              <a:lnSpc>
-                <a:spcPts val="1680"/>
-              </a:lnSpc>
-              <a:spcBef>
-                <a:spcPts val="300"/>
-              </a:spcBef>
-              <a:spcAft>
-                <a:spcPts val="300"/>
-              </a:spcAft>
-              <a:buNone/>
-            </a:pPr>
-            <a:r>
-              <a:rPr lang="en-US" sz="1200" i="1" dirty="0">
-                <a:solidFill>
-                  <a:srgbClr val="2C2C2C"/>
-                </a:solidFill>
-                <a:latin typeface="Verdana" pitchFamily="34" charset="0"/>
-                <a:ea typeface="Verdana" pitchFamily="34" charset="-122"/>
-                <a:cs typeface="Verdana" pitchFamily="34" charset="-120"/>
-              </a:rPr>
-              <a:t>"am - mah - vahs - yah! poor - ni - mah!"</a:t>
-            </a:r>
-            <a:pPr algn="l" indent="0" marL="0">
-              <a:lnSpc>
-                <a:spcPts val="1680"/>
-              </a:lnSpc>
-              <a:spcBef>
-                <a:spcPts val="300"/>
-              </a:spcBef>
-              <a:spcAft>
-                <a:spcPts val="300"/>
-              </a:spcAft>
-              <a:buNone/>
-            </a:pPr>
-            <a:r>
-              <a:rPr lang="en-US" sz="1200" dirty="0">
-                <a:solidFill>
-                  <a:srgbClr val="2C2C2C"/>
-                </a:solidFill>
-                <a:latin typeface="Verdana" pitchFamily="34" charset="0"/>
-                <a:ea typeface="Verdana" pitchFamily="34" charset="-122"/>
-                <a:cs typeface="Verdana" pitchFamily="34" charset="-120"/>
-              </a:rPr>
-              <a:t> — three times.</a:t>
-            </a:r>
-            <a:endParaRPr lang="en-US" sz="1200" dirty="0"/>
-          </a:p>
-        </p:txBody>
-      </p:sp>
-      <p:sp>
-        <p:nvSpPr>
-          <p:cNvPr id="5" name="Text 3"/>
-          <p:cNvSpPr/>
-          <p:nvPr/>
-        </p:nvSpPr>
-        <p:spPr>
-          <a:xfrm>
-            <a:off x="406301" y="1160413"/>
-            <a:ext cx="8498026" cy="426541"/>
-          </a:xfrm>
-          <a:prstGeom prst="rect">
-            <a:avLst/>
-          </a:prstGeom>
-          <a:noFill/>
-          <a:ln/>
-        </p:spPr>
-        <p:txBody>
-          <a:bodyPr wrap="square" lIns="0" tIns="0" rIns="0" bIns="0" rtlCol="0" anchor="t"/>
-          <a:lstStyle/>
-          <a:p>
-            <a:pPr algn="l" indent="0" marL="0">
-              <a:lnSpc>
-                <a:spcPts val="1680"/>
-              </a:lnSpc>
-              <a:spcBef>
-                <a:spcPts val="300"/>
-              </a:spcBef>
-              <a:spcAft>
-                <a:spcPts val="300"/>
-              </a:spcAft>
-              <a:buNone/>
-            </a:pPr>
-            <a:r>
-              <a:rPr lang="en-US" sz="1200" dirty="0">
-                <a:solidFill>
-                  <a:srgbClr val="2C2C2C"/>
-                </a:solidFill>
-                <a:latin typeface="Verdana" pitchFamily="34" charset="0"/>
-                <a:ea typeface="Verdana" pitchFamily="34" charset="-122"/>
-                <a:cs typeface="Verdana" pitchFamily="34" charset="-120"/>
-              </a:rPr>
-              <a:t>Recall: </a:t>
-            </a:r>
-            <a:pPr algn="l" indent="0" marL="0">
-              <a:lnSpc>
-                <a:spcPts val="1680"/>
-              </a:lnSpc>
-              <a:spcBef>
-                <a:spcPts val="300"/>
-              </a:spcBef>
-              <a:spcAft>
-                <a:spcPts val="300"/>
-              </a:spcAft>
-              <a:buNone/>
-            </a:pPr>
-            <a:r>
-              <a:rPr lang="en-US" sz="1200" i="1" dirty="0">
-                <a:solidFill>
-                  <a:srgbClr val="2C2C2C"/>
-                </a:solidFill>
-                <a:latin typeface="Verdana" pitchFamily="34" charset="0"/>
-                <a:ea typeface="Verdana" pitchFamily="34" charset="-122"/>
-                <a:cs typeface="Verdana" pitchFamily="34" charset="-120"/>
-              </a:rPr>
-              <a:t>"Is the Moon growing or shrinking right now?"</a:t>
-            </a:r>
-            <a:pPr algn="l" indent="0" marL="0">
-              <a:lnSpc>
-                <a:spcPts val="1680"/>
-              </a:lnSpc>
-              <a:spcBef>
-                <a:spcPts val="300"/>
-              </a:spcBef>
-              <a:spcAft>
-                <a:spcPts val="300"/>
-              </a:spcAft>
-              <a:buNone/>
-            </a:pPr>
-            <a:r>
-              <a:rPr lang="en-US" sz="1200" dirty="0">
-                <a:solidFill>
-                  <a:srgbClr val="2C2C2C"/>
-                </a:solidFill>
-                <a:latin typeface="Verdana" pitchFamily="34" charset="0"/>
-                <a:ea typeface="Verdana" pitchFamily="34" charset="-122"/>
-                <a:cs typeface="Verdana" pitchFamily="34" charset="-120"/>
-              </a:rPr>
-              <a:t> (Refer to the day's actual sky if children have observed.)</a:t>
-            </a:r>
-            <a:endParaRPr lang="en-US" sz="1200" dirty="0"/>
-          </a:p>
-        </p:txBody>
-      </p:sp>
-      <p:sp>
-        <p:nvSpPr>
-          <p:cNvPr id="6" name="Text 4"/>
           <p:cNvSpPr/>
           <p:nvPr/>
         </p:nvSpPr>
@@ -2829,7 +3409,7 @@
                 <a:ea typeface="Georgia" pitchFamily="34" charset="-122"/>
                 <a:cs typeface="Georgia" pitchFamily="34" charset="-120"/>
               </a:rPr>
-              <a:t>Activity (10 min)</a:t>
+              <a:t>Settle + recall (3 min)</a:t>
             </a:r>
             <a:endParaRPr lang="en-US" sz="1800" dirty="0"/>
           </a:p>
@@ -2877,7 +3457,53 @@
                 <a:ea typeface="Verdana" pitchFamily="34" charset="-122"/>
                 <a:cs typeface="Verdana" pitchFamily="34" charset="-120"/>
               </a:rPr>
-              <a:t>Each child:</a:t>
+              <a:t>Chant: </a:t>
+            </a:r>
+            <a:pPr algn="l" indent="0" marL="0">
+              <a:lnSpc>
+                <a:spcPts val="1680"/>
+              </a:lnSpc>
+              <a:spcBef>
+                <a:spcPts val="300"/>
+              </a:spcBef>
+              <a:spcAft>
+                <a:spcPts val="300"/>
+              </a:spcAft>
+              <a:buNone/>
+            </a:pPr>
+            <a:r>
+              <a:rPr lang="en-US" sz="1200" i="1" dirty="0">
+                <a:solidFill>
+                  <a:srgbClr val="2C2C2C"/>
+                </a:solidFill>
+                <a:latin typeface="Verdana" pitchFamily="34" charset="0"/>
+                <a:ea typeface="Verdana" pitchFamily="34" charset="-122"/>
+                <a:cs typeface="Verdana" pitchFamily="34" charset="-120"/>
+              </a:rPr>
+              <a:t>"am - mah - vahs - yah! poor - ni - mah!"</a:t>
+            </a:r>
+            <a:pPr algn="l" indent="0" marL="0">
+              <a:lnSpc>
+                <a:spcPts val="1680"/>
+              </a:lnSpc>
+              <a:spcBef>
+                <a:spcPts val="300"/>
+              </a:spcBef>
+              <a:spcAft>
+                <a:spcPts val="300"/>
+              </a:spcAft>
+              <a:buNone/>
+            </a:pPr>
+            <a:r>
+              <a:rPr lang="en-US" sz="1200" dirty="0">
+                <a:solidFill>
+                  <a:srgbClr val="2C2C2C"/>
+                </a:solidFill>
+                <a:latin typeface="Verdana" pitchFamily="34" charset="0"/>
+                <a:ea typeface="Verdana" pitchFamily="34" charset="-122"/>
+                <a:cs typeface="Verdana" pitchFamily="34" charset="-120"/>
+              </a:rPr>
+              <a:t> — three times.</a:t>
             </a:r>
             <a:endParaRPr lang="en-US" sz="1200" dirty="0"/>
           </a:p>
@@ -2891,8 +3517,8 @@
         </p:nvSpPr>
         <p:spPr>
           <a:xfrm>
-            <a:off x="634901" y="1173063"/>
-            <a:ext cx="8102798" cy="1013222"/>
+            <a:off x="406301" y="1160413"/>
+            <a:ext cx="8498026" cy="426541"/>
           </a:xfrm>
           <a:prstGeom prst="rect">
             <a:avLst/>
@@ -2904,15 +3530,17 @@
           <a:bodyPr wrap="square" lIns="0" tIns="0" rIns="0" bIns="0" rtlCol="0" anchor="t"/>
           <a:lstStyle/>
           <a:p>
-            <a:pPr algn="l" marL="342900" indent="-342900">
-              <a:lnSpc>
-                <a:spcPts val="1620"/>
-              </a:lnSpc>
-              <a:spcAft>
-                <a:spcPts val="300"/>
-              </a:spcAft>
-              <a:buSzPct val="100000"/>
-              <a:buChar char="•"/>
+            <a:pPr algn="l" indent="0" marL="0">
+              <a:lnSpc>
+                <a:spcPts val="1680"/>
+              </a:lnSpc>
+              <a:spcBef>
+                <a:spcPts val="300"/>
+              </a:spcBef>
+              <a:spcAft>
+                <a:spcPts val="300"/>
+              </a:spcAft>
+              <a:buNone/>
             </a:pPr>
             <a:r>
               <a:rPr lang="en-US" sz="1200" dirty="0">
@@ -2923,175 +3551,61 @@
                 <a:ea typeface="Verdana" pitchFamily="34" charset="-122"/>
                 <a:cs typeface="Verdana" pitchFamily="34" charset="-120"/>
               </a:rPr>
-              <a:t>Draws the Moon in the middle of a paper.</a:t>
+              <a:t>Recall: </a:t>
+            </a:r>
+            <a:pPr algn="l" indent="0" marL="0">
+              <a:lnSpc>
+                <a:spcPts val="1680"/>
+              </a:lnSpc>
+              <a:spcBef>
+                <a:spcPts val="300"/>
+              </a:spcBef>
+              <a:spcAft>
+                <a:spcPts val="300"/>
+              </a:spcAft>
+              <a:buNone/>
+            </a:pPr>
+            <a:r>
+              <a:rPr lang="en-US" sz="1200" i="1" dirty="0">
+                <a:solidFill>
+                  <a:srgbClr val="2C2C2C"/>
+                </a:solidFill>
+                <a:latin typeface="Verdana" pitchFamily="34" charset="0"/>
+                <a:ea typeface="Verdana" pitchFamily="34" charset="-122"/>
+                <a:cs typeface="Verdana" pitchFamily="34" charset="-120"/>
+              </a:rPr>
+              <a:t>"Is the Moon growing or shrinking right now?"</a:t>
+            </a:r>
+            <a:pPr algn="l" indent="0" marL="0">
+              <a:lnSpc>
+                <a:spcPts val="1680"/>
+              </a:lnSpc>
+              <a:spcBef>
+                <a:spcPts val="300"/>
+              </a:spcBef>
+              <a:spcAft>
+                <a:spcPts val="300"/>
+              </a:spcAft>
+              <a:buNone/>
+            </a:pPr>
+            <a:r>
+              <a:rPr lang="en-US" sz="1200" dirty="0">
+                <a:solidFill>
+                  <a:srgbClr val="2C2C2C"/>
+                </a:solidFill>
+                <a:latin typeface="Verdana" pitchFamily="34" charset="0"/>
+                <a:ea typeface="Verdana" pitchFamily="34" charset="-122"/>
+                <a:cs typeface="Verdana" pitchFamily="34" charset="-120"/>
+              </a:rPr>
+              <a:t> (Refer to the day's actual sky if children have observed.)</a:t>
             </a:r>
             <a:endParaRPr lang="en-US" sz="1200" dirty="0"/>
           </a:p>
-          <a:p>
-            <a:pPr algn="l" marL="342900" indent="-342900">
-              <a:lnSpc>
-                <a:spcPts val="1620"/>
-              </a:lnSpc>
-              <a:spcAft>
-                <a:spcPts val="300"/>
-              </a:spcAft>
-              <a:buSzPct val="100000"/>
-              <a:buChar char="•"/>
-            </a:pPr>
-            <a:r>
-              <a:rPr lang="en-US" sz="1200" dirty="0">
-                <a:solidFill>
-                  <a:srgbClr val="2C2C2C"/>
-                </a:solidFill>
-                <a:latin typeface="Verdana" pitchFamily="34" charset="0"/>
-                <a:ea typeface="Verdana" pitchFamily="34" charset="-122"/>
-                <a:cs typeface="Verdana" pitchFamily="34" charset="-120"/>
-              </a:rPr>
-              <a:t>Draws 4 little "house stars" around the Moon (we'll do 4, not 27).</a:t>
-            </a:r>
-            <a:endParaRPr lang="en-US" sz="1200" dirty="0"/>
-          </a:p>
-          <a:p>
-            <a:pPr algn="l" marL="342900" indent="-342900">
-              <a:lnSpc>
-                <a:spcPts val="1620"/>
-              </a:lnSpc>
-              <a:spcAft>
-                <a:spcPts val="300"/>
-              </a:spcAft>
-              <a:buSzPct val="100000"/>
-              <a:buChar char="•"/>
-            </a:pPr>
-            <a:r>
-              <a:rPr lang="en-US" sz="1200" dirty="0">
-                <a:solidFill>
-                  <a:srgbClr val="2C2C2C"/>
-                </a:solidFill>
-                <a:latin typeface="Verdana" pitchFamily="34" charset="0"/>
-                <a:ea typeface="Verdana" pitchFamily="34" charset="-122"/>
-                <a:cs typeface="Verdana" pitchFamily="34" charset="-120"/>
-              </a:rPr>
-              <a:t>Labels one of the houses with the name </a:t>
-            </a:r>
-            <a:pPr algn="l" indent="0" marL="0">
-              <a:lnSpc>
-                <a:spcPts val="1620"/>
-              </a:lnSpc>
-              <a:spcAft>
-                <a:spcPts val="300"/>
-              </a:spcAft>
-              <a:buNone/>
-            </a:pPr>
-            <a:r>
-              <a:rPr lang="en-US" sz="1200" i="1" dirty="0">
-                <a:solidFill>
-                  <a:srgbClr val="2C2C2C"/>
-                </a:solidFill>
-                <a:latin typeface="Verdana" pitchFamily="34" charset="0"/>
-                <a:ea typeface="Verdana" pitchFamily="34" charset="-122"/>
-                <a:cs typeface="Verdana" pitchFamily="34" charset="-120"/>
-              </a:rPr>
-              <a:t>Aśvinī</a:t>
-            </a:r>
-            <a:pPr algn="l" indent="0" marL="0">
-              <a:lnSpc>
-                <a:spcPts val="1620"/>
-              </a:lnSpc>
-              <a:spcAft>
-                <a:spcPts val="300"/>
-              </a:spcAft>
-              <a:buNone/>
-            </a:pPr>
-            <a:r>
-              <a:rPr lang="en-US" sz="1200" dirty="0">
-                <a:solidFill>
-                  <a:srgbClr val="2C2C2C"/>
-                </a:solidFill>
-                <a:latin typeface="Verdana" pitchFamily="34" charset="0"/>
-                <a:ea typeface="Verdana" pitchFamily="34" charset="-122"/>
-                <a:cs typeface="Verdana" pitchFamily="34" charset="-120"/>
-              </a:rPr>
-              <a:t> (or any nakṣatra name the teacher chooses).</a:t>
-            </a:r>
-            <a:endParaRPr lang="en-US" sz="1200" dirty="0"/>
-          </a:p>
-          <a:p>
-            <a:pPr algn="l" marL="342900" indent="-342900">
-              <a:lnSpc>
-                <a:spcPts val="1620"/>
-              </a:lnSpc>
-              <a:spcAft>
-                <a:spcPts val="300"/>
-              </a:spcAft>
-              <a:buSzPct val="100000"/>
-              <a:buChar char="•"/>
-            </a:pPr>
-            <a:r>
-              <a:rPr lang="en-US" sz="1200" dirty="0">
-                <a:solidFill>
-                  <a:srgbClr val="2C2C2C"/>
-                </a:solidFill>
-                <a:latin typeface="Verdana" pitchFamily="34" charset="0"/>
-                <a:ea typeface="Verdana" pitchFamily="34" charset="-122"/>
-                <a:cs typeface="Verdana" pitchFamily="34" charset="-120"/>
-              </a:rPr>
-              <a:t>Draws arrows showing the Moon's path from one house to the next.</a:t>
-            </a:r>
-            <a:endParaRPr lang="en-US" sz="1200" dirty="0"/>
-          </a:p>
         </p:txBody>
       </p:sp>
       <p:sp>
         <p:nvSpPr>
           <p:cNvPr id="6" name="Text 4"/>
-          <p:cNvSpPr/>
-          <p:nvPr/>
-        </p:nvSpPr>
-        <p:spPr>
-          <a:xfrm>
-            <a:off x="406301" y="2275136"/>
-            <a:ext cx="8498026" cy="213271"/>
-          </a:xfrm>
-          <a:prstGeom prst="rect">
-            <a:avLst/>
-          </a:prstGeom>
-          <a:noFill/>
-          <a:ln/>
-        </p:spPr>
-        <p:txBody>
-          <a:bodyPr wrap="square" lIns="0" tIns="0" rIns="0" bIns="0" rtlCol="0" anchor="t"/>
-          <a:lstStyle/>
-          <a:p>
-            <a:pPr algn="l" indent="0" marL="0">
-              <a:lnSpc>
-                <a:spcPts val="1680"/>
-              </a:lnSpc>
-              <a:spcBef>
-                <a:spcPts val="300"/>
-              </a:spcBef>
-              <a:spcAft>
-                <a:spcPts val="300"/>
-              </a:spcAft>
-              <a:buNone/>
-            </a:pPr>
-            <a:r>
-              <a:rPr lang="en-US" sz="1200" dirty="0">
-                <a:solidFill>
-                  <a:srgbClr val="2C2C2C"/>
-                </a:solidFill>
-                <a:latin typeface="Verdana" pitchFamily="34" charset="0"/>
-                <a:ea typeface="Verdana" pitchFamily="34" charset="-122"/>
-                <a:cs typeface="Verdana" pitchFamily="34" charset="-120"/>
-              </a:rPr>
-              <a:t>This is a drawing exercise. Don't drill the names.</a:t>
-            </a:r>
-            <a:endParaRPr lang="en-US" sz="1200" dirty="0"/>
-          </a:p>
-        </p:txBody>
-      </p:sp>
-      <p:sp>
-        <p:nvSpPr>
-          <p:cNvPr id="7" name="Text 5"/>
           <p:cNvSpPr/>
           <p:nvPr/>
         </p:nvSpPr>
@@ -3241,7 +3755,7 @@
                 <a:ea typeface="Georgia" pitchFamily="34" charset="-122"/>
                 <a:cs typeface="Georgia" pitchFamily="34" charset="-120"/>
               </a:rPr>
-              <a:t>Wrap-up (5 min)</a:t>
+              <a:t>Activity (10 min)</a:t>
             </a:r>
             <a:endParaRPr lang="en-US" sz="1800" dirty="0"/>
           </a:p>
@@ -3289,7 +3803,7 @@
                 <a:ea typeface="Verdana" pitchFamily="34" charset="-122"/>
                 <a:cs typeface="Verdana" pitchFamily="34" charset="-120"/>
               </a:rPr>
-              <a:t>– Show a few drawings.</a:t>
+              <a:t>Each child:</a:t>
             </a:r>
             <a:endParaRPr lang="en-US" sz="1200" dirty="0"/>
           </a:p>
@@ -3304,7 +3818,7 @@
         <p:spPr>
           <a:xfrm>
             <a:off x="634901" y="1173063"/>
-            <a:ext cx="8102798" cy="731341"/>
+            <a:ext cx="8102798" cy="1013222"/>
           </a:xfrm>
           <a:prstGeom prst="rect">
             <a:avLst/>
@@ -3327,15 +3841,15 @@
               <a:buChar char="•"/>
             </a:pPr>
             <a:r>
-              <a:rPr lang="en-US" sz="1200" i="1" dirty="0">
-                <a:solidFill>
-                  <a:srgbClr val="2C2C2C"/>
-                </a:solidFill>
-                <a:latin typeface="Verdana" pitchFamily="34" charset="0"/>
-                <a:ea typeface="Verdana" pitchFamily="34" charset="-122"/>
-                <a:cs typeface="Verdana" pitchFamily="34" charset="-120"/>
-              </a:rPr>
-              <a:t>"What did we learn? The Moon visits a new house every night. There are 27 houses in all. The Moon's sisters give our months their names."</a:t>
+              <a:rPr lang="en-US" sz="1200" dirty="0">
+                <a:solidFill>
+                  <a:srgbClr val="2C2C2C"/>
+                </a:solidFill>
+                <a:latin typeface="Verdana" pitchFamily="34" charset="0"/>
+                <a:ea typeface="Verdana" pitchFamily="34" charset="-122"/>
+                <a:cs typeface="Verdana" pitchFamily="34" charset="-120"/>
+              </a:rPr>
+              <a:t>Draws the Moon in the middle of a paper.</a:t>
             </a:r>
             <a:endParaRPr lang="en-US" sz="1200" dirty="0"/>
           </a:p>
@@ -3351,24 +3865,28 @@
               <a:buChar char="•"/>
             </a:pPr>
             <a:r>
-              <a:rPr lang="en-US" sz="1200" b="1" dirty="0">
-                <a:solidFill>
-                  <a:srgbClr val="2C2C2C"/>
-                </a:solidFill>
-                <a:latin typeface="Verdana" pitchFamily="34" charset="0"/>
-                <a:ea typeface="Verdana" pitchFamily="34" charset="-122"/>
-                <a:cs typeface="Verdana" pitchFamily="34" charset="-120"/>
-              </a:rPr>
-              <a:t>Homework:</a:t>
-            </a:r>
-            <a:pPr algn="l" indent="0" marL="0">
+              <a:rPr lang="en-US" sz="1200" dirty="0">
+                <a:solidFill>
+                  <a:srgbClr val="2C2C2C"/>
+                </a:solidFill>
+                <a:latin typeface="Verdana" pitchFamily="34" charset="0"/>
+                <a:ea typeface="Verdana" pitchFamily="34" charset="-122"/>
+                <a:cs typeface="Verdana" pitchFamily="34" charset="-120"/>
+              </a:rPr>
+              <a:t>Draws 4 little "house stars" around the Moon (we'll do 4, not 27).</a:t>
+            </a:r>
+            <a:endParaRPr lang="en-US" sz="1200" dirty="0"/>
+          </a:p>
+          <a:p>
+            <a:pPr algn="l" marL="342900" indent="-342900">
               <a:lnSpc>
                 <a:spcPts val="1620"/>
               </a:lnSpc>
               <a:spcAft>
                 <a:spcPts val="300"/>
               </a:spcAft>
-              <a:buNone/>
+              <a:buSzPct val="100000"/>
+              <a:buChar char="•"/>
             </a:pPr>
             <a:r>
               <a:rPr lang="en-US" sz="1200" dirty="0">
@@ -3379,7 +3897,7 @@
                 <a:ea typeface="Verdana" pitchFamily="34" charset="-122"/>
                 <a:cs typeface="Verdana" pitchFamily="34" charset="-120"/>
               </a:rPr>
-              <a:t> </a:t>
+              <a:t>Labels one of the houses with the name </a:t>
             </a:r>
             <a:pPr algn="l" indent="0" marL="0">
               <a:lnSpc>
@@ -3399,15 +3917,107 @@
                 <a:ea typeface="Verdana" pitchFamily="34" charset="-122"/>
                 <a:cs typeface="Verdana" pitchFamily="34" charset="-120"/>
               </a:rPr>
-              <a:t>Look at the Moon tonight. What shape? Write the date.</a:t>
+              <a:t>Aśvinī</a:t>
+            </a:r>
+            <a:pPr algn="l" indent="0" marL="0">
+              <a:lnSpc>
+                <a:spcPts val="1620"/>
+              </a:lnSpc>
+              <a:spcAft>
+                <a:spcPts val="300"/>
+              </a:spcAft>
+              <a:buNone/>
+            </a:pPr>
+            <a:r>
+              <a:rPr lang="en-US" sz="1200" dirty="0">
+                <a:solidFill>
+                  <a:srgbClr val="2C2C2C"/>
+                </a:solidFill>
+                <a:latin typeface="Verdana" pitchFamily="34" charset="0"/>
+                <a:ea typeface="Verdana" pitchFamily="34" charset="-122"/>
+                <a:cs typeface="Verdana" pitchFamily="34" charset="-120"/>
+              </a:rPr>
+              <a:t> (or any nakṣatra name the teacher chooses).</a:t>
             </a:r>
             <a:endParaRPr lang="en-US" sz="1200" dirty="0"/>
           </a:p>
+          <a:p>
+            <a:pPr algn="l" marL="342900" indent="-342900">
+              <a:lnSpc>
+                <a:spcPts val="1620"/>
+              </a:lnSpc>
+              <a:spcAft>
+                <a:spcPts val="300"/>
+              </a:spcAft>
+              <a:buSzPct val="100000"/>
+              <a:buChar char="•"/>
+            </a:pPr>
+            <a:r>
+              <a:rPr lang="en-US" sz="1200" dirty="0">
+                <a:solidFill>
+                  <a:srgbClr val="2C2C2C"/>
+                </a:solidFill>
+                <a:latin typeface="Verdana" pitchFamily="34" charset="0"/>
+                <a:ea typeface="Verdana" pitchFamily="34" charset="-122"/>
+                <a:cs typeface="Verdana" pitchFamily="34" charset="-120"/>
+              </a:rPr>
+              <a:t>Draws arrows showing the Moon's path from one house to the next.</a:t>
+            </a:r>
+            <a:endParaRPr lang="en-US" sz="1200" dirty="0"/>
+          </a:p>
         </p:txBody>
       </p:sp>
       <p:sp>
         <p:nvSpPr>
           <p:cNvPr id="6" name="Text 4"/>
+          <p:cNvSpPr/>
+          <p:nvPr/>
+        </p:nvSpPr>
+        <p:spPr>
+          <a:xfrm>
+            <a:off x="406301" y="2275136"/>
+            <a:ext cx="8498026" cy="213271"/>
+          </a:xfrm>
+          <a:prstGeom prst="rect">
+            <a:avLst/>
+          </a:prstGeom>
+          <a:noFill/>
+          <a:ln/>
+        </p:spPr>
+        <p:txBody>
+          <a:bodyPr wrap="square" lIns="0" tIns="0" rIns="0" bIns="0" rtlCol="0" anchor="t"/>
+          <a:lstStyle/>
+          <a:p>
+            <a:pPr algn="l" indent="0" marL="0">
+              <a:lnSpc>
+                <a:spcPts val="1680"/>
+              </a:lnSpc>
+              <a:spcBef>
+                <a:spcPts val="300"/>
+              </a:spcBef>
+              <a:spcAft>
+                <a:spcPts val="300"/>
+              </a:spcAft>
+              <a:buNone/>
+            </a:pPr>
+            <a:r>
+              <a:rPr lang="en-US" sz="1200" dirty="0">
+                <a:solidFill>
+                  <a:srgbClr val="2C2C2C"/>
+                </a:solidFill>
+                <a:latin typeface="Verdana" pitchFamily="34" charset="0"/>
+                <a:ea typeface="Verdana" pitchFamily="34" charset="-122"/>
+                <a:cs typeface="Verdana" pitchFamily="34" charset="-120"/>
+              </a:rPr>
+              <a:t>This is a drawing exercise. Don't drill the names.</a:t>
+            </a:r>
+            <a:endParaRPr lang="en-US" sz="1200" dirty="0"/>
+          </a:p>
+        </p:txBody>
+      </p:sp>
+      <p:sp>
+        <p:nvSpPr>
+          <p:cNvPr id="7" name="Text 5"/>
           <p:cNvSpPr/>
           <p:nvPr/>
         </p:nvSpPr>
@@ -3557,7 +4167,7 @@
                 <a:ea typeface="Georgia" pitchFamily="34" charset="-122"/>
                 <a:cs typeface="Georgia" pitchFamily="34" charset="-120"/>
               </a:rPr>
-              <a:t>Homework</a:t>
+              <a:t>Wrap-up (5 min)</a:t>
             </a:r>
             <a:endParaRPr lang="en-US" sz="1800" dirty="0"/>
           </a:p>
@@ -3571,8 +4181,8 @@
         </p:nvSpPr>
         <p:spPr>
           <a:xfrm>
-            <a:off x="406301" y="870942"/>
-            <a:ext cx="8498026" cy="213271"/>
+            <a:off x="634901" y="883593"/>
+            <a:ext cx="8102798" cy="975122"/>
           </a:xfrm>
           <a:prstGeom prst="rect">
             <a:avLst/>
@@ -3584,17 +4194,15 @@
           <a:bodyPr wrap="square" lIns="0" tIns="0" rIns="0" bIns="0" rtlCol="0" anchor="t"/>
           <a:lstStyle/>
           <a:p>
-            <a:pPr algn="l" indent="0" marL="0">
-              <a:lnSpc>
-                <a:spcPts val="1680"/>
-              </a:lnSpc>
-              <a:spcBef>
-                <a:spcPts val="300"/>
-              </a:spcBef>
-              <a:spcAft>
-                <a:spcPts val="300"/>
-              </a:spcAft>
-              <a:buNone/>
+            <a:pPr algn="l" marL="342900" indent="-342900">
+              <a:lnSpc>
+                <a:spcPts val="1620"/>
+              </a:lnSpc>
+              <a:spcAft>
+                <a:spcPts val="300"/>
+              </a:spcAft>
+              <a:buSzPct val="100000"/>
+              <a:buChar char="•"/>
             </a:pPr>
             <a:r>
               <a:rPr lang="en-US" sz="1200" dirty="0">
@@ -3605,7 +4213,95 @@
                 <a:ea typeface="Verdana" pitchFamily="34" charset="-122"/>
                 <a:cs typeface="Verdana" pitchFamily="34" charset="-120"/>
               </a:rPr>
-              <a:t>– Continue the Moon Diary.</a:t>
+              <a:t>Show a few drawings.</a:t>
+            </a:r>
+            <a:endParaRPr lang="en-US" sz="1200" dirty="0"/>
+          </a:p>
+          <a:p>
+            <a:pPr algn="l" marL="342900" indent="-342900">
+              <a:lnSpc>
+                <a:spcPts val="1620"/>
+              </a:lnSpc>
+              <a:spcAft>
+                <a:spcPts val="300"/>
+              </a:spcAft>
+              <a:buSzPct val="100000"/>
+              <a:buChar char="•"/>
+            </a:pPr>
+            <a:r>
+              <a:rPr lang="en-US" sz="1200" i="1" dirty="0">
+                <a:solidFill>
+                  <a:srgbClr val="2C2C2C"/>
+                </a:solidFill>
+                <a:latin typeface="Verdana" pitchFamily="34" charset="0"/>
+                <a:ea typeface="Verdana" pitchFamily="34" charset="-122"/>
+                <a:cs typeface="Verdana" pitchFamily="34" charset="-120"/>
+              </a:rPr>
+              <a:t>"What did we learn? The Moon visits a new house every night. There are 27 houses in all. The Moon's sisters give our months their names."</a:t>
+            </a:r>
+            <a:endParaRPr lang="en-US" sz="1200" dirty="0"/>
+          </a:p>
+          <a:p>
+            <a:pPr algn="l" marL="342900" indent="-342900">
+              <a:lnSpc>
+                <a:spcPts val="1620"/>
+              </a:lnSpc>
+              <a:spcAft>
+                <a:spcPts val="300"/>
+              </a:spcAft>
+              <a:buSzPct val="100000"/>
+              <a:buChar char="•"/>
+            </a:pPr>
+            <a:r>
+              <a:rPr lang="en-US" sz="1200" b="1" dirty="0">
+                <a:solidFill>
+                  <a:srgbClr val="2C2C2C"/>
+                </a:solidFill>
+                <a:latin typeface="Verdana" pitchFamily="34" charset="0"/>
+                <a:ea typeface="Verdana" pitchFamily="34" charset="-122"/>
+                <a:cs typeface="Verdana" pitchFamily="34" charset="-120"/>
+              </a:rPr>
+              <a:t>Homework:</a:t>
+            </a:r>
+            <a:pPr algn="l" indent="0" marL="0">
+              <a:lnSpc>
+                <a:spcPts val="1620"/>
+              </a:lnSpc>
+              <a:spcAft>
+                <a:spcPts val="300"/>
+              </a:spcAft>
+              <a:buNone/>
+            </a:pPr>
+            <a:r>
+              <a:rPr lang="en-US" sz="1200" dirty="0">
+                <a:solidFill>
+                  <a:srgbClr val="2C2C2C"/>
+                </a:solidFill>
+                <a:latin typeface="Verdana" pitchFamily="34" charset="0"/>
+                <a:ea typeface="Verdana" pitchFamily="34" charset="-122"/>
+                <a:cs typeface="Verdana" pitchFamily="34" charset="-120"/>
+              </a:rPr>
+              <a:t> </a:t>
+            </a:r>
+            <a:pPr algn="l" indent="0" marL="0">
+              <a:lnSpc>
+                <a:spcPts val="1620"/>
+              </a:lnSpc>
+              <a:spcAft>
+                <a:spcPts val="300"/>
+              </a:spcAft>
+              <a:buNone/>
+            </a:pPr>
+            <a:r>
+              <a:rPr lang="en-US" sz="1200" i="1" dirty="0">
+                <a:solidFill>
+                  <a:srgbClr val="2C2C2C"/>
+                </a:solidFill>
+                <a:latin typeface="Verdana" pitchFamily="34" charset="0"/>
+                <a:ea typeface="Verdana" pitchFamily="34" charset="-122"/>
+                <a:cs typeface="Verdana" pitchFamily="34" charset="-120"/>
+              </a:rPr>
+              <a:t>Look at the Moon tonight. What shape? Write the date.</a:t>
             </a:r>
             <a:endParaRPr lang="en-US" sz="1200" dirty="0"/>
           </a:p>
@@ -3763,7 +4459,7 @@
                 <a:ea typeface="Georgia" pitchFamily="34" charset="-122"/>
                 <a:cs typeface="Georgia" pitchFamily="34" charset="-120"/>
               </a:rPr>
-              <a:t>Differentiation</a:t>
+              <a:t>Homework</a:t>
             </a:r>
             <a:endParaRPr lang="en-US" sz="1800" dirty="0"/>
           </a:p>
@@ -3778,7 +4474,7 @@
         <p:spPr>
           <a:xfrm>
             <a:off x="634901" y="883593"/>
-            <a:ext cx="8102798" cy="525661"/>
+            <a:ext cx="8102798" cy="281880"/>
           </a:xfrm>
           <a:prstGeom prst="rect">
             <a:avLst/>
@@ -3801,26 +4497,6 @@
               <a:buChar char="•"/>
             </a:pPr>
             <a:r>
-              <a:rPr lang="en-US" sz="1200" b="1" dirty="0">
-                <a:solidFill>
-                  <a:srgbClr val="2C2C2C"/>
-                </a:solidFill>
-                <a:latin typeface="Verdana" pitchFamily="34" charset="0"/>
-                <a:ea typeface="Verdana" pitchFamily="34" charset="-122"/>
-                <a:cs typeface="Verdana" pitchFamily="34" charset="-120"/>
-              </a:rPr>
-              <a:t>Tier up:</a:t>
-            </a:r>
-            <a:pPr algn="l" indent="0" marL="0">
-              <a:lnSpc>
-                <a:spcPts val="1620"/>
-              </a:lnSpc>
-              <a:spcAft>
-                <a:spcPts val="300"/>
-              </a:spcAft>
-              <a:buNone/>
-            </a:pPr>
-            <a:r>
               <a:rPr lang="en-US" sz="1200" dirty="0">
                 <a:solidFill>
                   <a:srgbClr val="2C2C2C"/>
@@ -3829,51 +4505,7 @@
                 <a:ea typeface="Verdana" pitchFamily="34" charset="-122"/>
                 <a:cs typeface="Verdana" pitchFamily="34" charset="-120"/>
               </a:rPr>
-              <a:t> Try drawing all 27 houses in a ring around the Moon.</a:t>
-            </a:r>
-            <a:endParaRPr lang="en-US" sz="1200" dirty="0"/>
-          </a:p>
-          <a:p>
-            <a:pPr algn="l" marL="342900" indent="-342900">
-              <a:lnSpc>
-                <a:spcPts val="1620"/>
-              </a:lnSpc>
-              <a:spcAft>
-                <a:spcPts val="300"/>
-              </a:spcAft>
-              <a:buSzPct val="100000"/>
-              <a:buChar char="•"/>
-            </a:pPr>
-            <a:r>
-              <a:rPr lang="en-US" sz="1200" b="1" dirty="0">
-                <a:solidFill>
-                  <a:srgbClr val="2C2C2C"/>
-                </a:solidFill>
-                <a:latin typeface="Verdana" pitchFamily="34" charset="0"/>
-                <a:ea typeface="Verdana" pitchFamily="34" charset="-122"/>
-                <a:cs typeface="Verdana" pitchFamily="34" charset="-120"/>
-              </a:rPr>
-              <a:t>Tier down:</a:t>
-            </a:r>
-            <a:pPr algn="l" indent="0" marL="0">
-              <a:lnSpc>
-                <a:spcPts val="1620"/>
-              </a:lnSpc>
-              <a:spcAft>
-                <a:spcPts val="300"/>
-              </a:spcAft>
-              <a:buNone/>
-            </a:pPr>
-            <a:r>
-              <a:rPr lang="en-US" sz="1200" dirty="0">
-                <a:solidFill>
-                  <a:srgbClr val="2C2C2C"/>
-                </a:solidFill>
-                <a:latin typeface="Verdana" pitchFamily="34" charset="0"/>
-                <a:ea typeface="Verdana" pitchFamily="34" charset="-122"/>
-                <a:cs typeface="Verdana" pitchFamily="34" charset="-120"/>
-              </a:rPr>
-              <a:t> Just draw the Moon and one house. The story is the lesson — the drawing supports it.</a:t>
+              <a:t>Continue the Moon Diary.</a:t>
             </a:r>
             <a:endParaRPr lang="en-US" sz="1200" dirty="0"/>
           </a:p>
@@ -4031,7 +4663,7 @@
                 <a:ea typeface="Georgia" pitchFamily="34" charset="-122"/>
                 <a:cs typeface="Georgia" pitchFamily="34" charset="-120"/>
               </a:rPr>
-              <a:t>Teacher's quick notes</a:t>
+              <a:t>Differentiation</a:t>
             </a:r>
             <a:endParaRPr lang="en-US" sz="1800" dirty="0"/>
           </a:p>
@@ -4045,8 +4677,8 @@
         </p:nvSpPr>
         <p:spPr>
           <a:xfrm>
-            <a:off x="406301" y="870942"/>
-            <a:ext cx="8498026" cy="1706166"/>
+            <a:off x="634901" y="883593"/>
+            <a:ext cx="8102798" cy="525661"/>
           </a:xfrm>
           <a:prstGeom prst="rect">
             <a:avLst/>
@@ -4058,13 +4690,31 @@
           <a:bodyPr wrap="square" lIns="0" tIns="0" rIns="0" bIns="0" rtlCol="0" anchor="t"/>
           <a:lstStyle/>
           <a:p>
-            <a:pPr algn="l" indent="0" marL="0">
-              <a:lnSpc>
-                <a:spcPts val="1680"/>
-              </a:lnSpc>
-              <a:spcBef>
-                <a:spcPts val="300"/>
-              </a:spcBef>
+            <a:pPr algn="l" marL="342900" indent="-342900">
+              <a:lnSpc>
+                <a:spcPts val="1620"/>
+              </a:lnSpc>
+              <a:spcAft>
+                <a:spcPts val="300"/>
+              </a:spcAft>
+              <a:buSzPct val="100000"/>
+              <a:buChar char="•"/>
+            </a:pPr>
+            <a:r>
+              <a:rPr lang="en-US" sz="1200" b="1" dirty="0">
+                <a:solidFill>
+                  <a:srgbClr val="2C2C2C"/>
+                </a:solidFill>
+                <a:latin typeface="Verdana" pitchFamily="34" charset="0"/>
+                <a:ea typeface="Verdana" pitchFamily="34" charset="-122"/>
+                <a:cs typeface="Verdana" pitchFamily="34" charset="-120"/>
+              </a:rPr>
+              <a:t>Tier up:</a:t>
+            </a:r>
+            <a:pPr algn="l" indent="0" marL="0">
+              <a:lnSpc>
+                <a:spcPts val="1620"/>
+              </a:lnSpc>
               <a:spcAft>
                 <a:spcPts val="300"/>
               </a:spcAft>
@@ -4079,38 +4729,36 @@
                 <a:ea typeface="Verdana" pitchFamily="34" charset="-122"/>
                 <a:cs typeface="Verdana" pitchFamily="34" charset="-120"/>
               </a:rPr>
-              <a:t>– The "27 sisters" framing is a teaching tool drawing on traditional stories (the Dakṣa's daughters narrative appears in several </a:t>
-            </a:r>
-            <a:pPr algn="l" indent="0" marL="0">
-              <a:lnSpc>
-                <a:spcPts val="1680"/>
-              </a:lnSpc>
-              <a:spcBef>
-                <a:spcPts val="300"/>
-              </a:spcBef>
-              <a:spcAft>
-                <a:spcPts val="300"/>
-              </a:spcAft>
-              <a:buNone/>
-            </a:pPr>
-            <a:r>
-              <a:rPr lang="en-US" sz="1200" i="1" dirty="0">
-                <a:solidFill>
-                  <a:srgbClr val="2C2C2C"/>
-                </a:solidFill>
-                <a:latin typeface="Verdana" pitchFamily="34" charset="0"/>
-                <a:ea typeface="Verdana" pitchFamily="34" charset="-122"/>
-                <a:cs typeface="Verdana" pitchFamily="34" charset="-120"/>
-              </a:rPr>
-              <a:t>Purāṇa</a:t>
-            </a:r>
-            <a:pPr algn="l" indent="0" marL="0">
-              <a:lnSpc>
-                <a:spcPts val="1680"/>
-              </a:lnSpc>
-              <a:spcBef>
-                <a:spcPts val="300"/>
-              </a:spcBef>
+              <a:t> Try drawing all 27 houses in a ring around the Moon.</a:t>
+            </a:r>
+            <a:endParaRPr lang="en-US" sz="1200" dirty="0"/>
+          </a:p>
+          <a:p>
+            <a:pPr algn="l" marL="342900" indent="-342900">
+              <a:lnSpc>
+                <a:spcPts val="1620"/>
+              </a:lnSpc>
+              <a:spcAft>
+                <a:spcPts val="300"/>
+              </a:spcAft>
+              <a:buSzPct val="100000"/>
+              <a:buChar char="•"/>
+            </a:pPr>
+            <a:r>
+              <a:rPr lang="en-US" sz="1200" b="1" dirty="0">
+                <a:solidFill>
+                  <a:srgbClr val="2C2C2C"/>
+                </a:solidFill>
+                <a:latin typeface="Verdana" pitchFamily="34" charset="0"/>
+                <a:ea typeface="Verdana" pitchFamily="34" charset="-122"/>
+                <a:cs typeface="Verdana" pitchFamily="34" charset="-120"/>
+              </a:rPr>
+              <a:t>Tier down:</a:t>
+            </a:r>
+            <a:pPr algn="l" indent="0" marL="0">
+              <a:lnSpc>
+                <a:spcPts val="1620"/>
+              </a:lnSpc>
               <a:spcAft>
                 <a:spcPts val="300"/>
               </a:spcAft>
@@ -4125,145 +4773,7 @@
                 <a:ea typeface="Verdana" pitchFamily="34" charset="-122"/>
                 <a:cs typeface="Verdana" pitchFamily="34" charset="-120"/>
               </a:rPr>
-              <a:t>s, with the Moon as </a:t>
-            </a:r>
-            <a:pPr algn="l" indent="0" marL="0">
-              <a:lnSpc>
-                <a:spcPts val="1680"/>
-              </a:lnSpc>
-              <a:spcBef>
-                <a:spcPts val="300"/>
-              </a:spcBef>
-              <a:spcAft>
-                <a:spcPts val="300"/>
-              </a:spcAft>
-              <a:buNone/>
-            </a:pPr>
-            <a:r>
-              <a:rPr lang="en-US" sz="1200" i="1" dirty="0">
-                <a:solidFill>
-                  <a:srgbClr val="2C2C2C"/>
-                </a:solidFill>
-                <a:latin typeface="Verdana" pitchFamily="34" charset="0"/>
-                <a:ea typeface="Verdana" pitchFamily="34" charset="-122"/>
-                <a:cs typeface="Verdana" pitchFamily="34" charset="-120"/>
-              </a:rPr>
-              <a:t>Soma</a:t>
-            </a:r>
-            <a:pPr algn="l" indent="0" marL="0">
-              <a:lnSpc>
-                <a:spcPts val="1680"/>
-              </a:lnSpc>
-              <a:spcBef>
-                <a:spcPts val="300"/>
-              </a:spcBef>
-              <a:spcAft>
-                <a:spcPts val="300"/>
-              </a:spcAft>
-              <a:buNone/>
-            </a:pPr>
-            <a:r>
-              <a:rPr lang="en-US" sz="1200" dirty="0">
-                <a:solidFill>
-                  <a:srgbClr val="2C2C2C"/>
-                </a:solidFill>
-                <a:latin typeface="Verdana" pitchFamily="34" charset="0"/>
-                <a:ea typeface="Verdana" pitchFamily="34" charset="-122"/>
-                <a:cs typeface="Verdana" pitchFamily="34" charset="-120"/>
-              </a:rPr>
-              <a:t> / Candra). At Primary band, frame it as "an old story" — don't claim a single canonical source. – The point: children learn that the Moon's position in the sky changes night by night, in a 27-night cycle (the </a:t>
-            </a:r>
-            <a:pPr algn="l" indent="0" marL="0">
-              <a:lnSpc>
-                <a:spcPts val="1680"/>
-              </a:lnSpc>
-              <a:spcBef>
-                <a:spcPts val="300"/>
-              </a:spcBef>
-              <a:spcAft>
-                <a:spcPts val="300"/>
-              </a:spcAft>
-              <a:buNone/>
-            </a:pPr>
-            <a:r>
-              <a:rPr lang="en-US" sz="1200" i="1" dirty="0">
-                <a:solidFill>
-                  <a:srgbClr val="2C2C2C"/>
-                </a:solidFill>
-                <a:latin typeface="Verdana" pitchFamily="34" charset="0"/>
-                <a:ea typeface="Verdana" pitchFamily="34" charset="-122"/>
-                <a:cs typeface="Verdana" pitchFamily="34" charset="-120"/>
-              </a:rPr>
-              <a:t>sidereal</a:t>
-            </a:r>
-            <a:pPr algn="l" indent="0" marL="0">
-              <a:lnSpc>
-                <a:spcPts val="1680"/>
-              </a:lnSpc>
-              <a:spcBef>
-                <a:spcPts val="300"/>
-              </a:spcBef>
-              <a:spcAft>
-                <a:spcPts val="300"/>
-              </a:spcAft>
-              <a:buNone/>
-            </a:pPr>
-            <a:r>
-              <a:rPr lang="en-US" sz="1200" dirty="0">
-                <a:solidFill>
-                  <a:srgbClr val="2C2C2C"/>
-                </a:solidFill>
-                <a:latin typeface="Verdana" pitchFamily="34" charset="0"/>
-                <a:ea typeface="Verdana" pitchFamily="34" charset="-122"/>
-                <a:cs typeface="Verdana" pitchFamily="34" charset="-120"/>
-              </a:rPr>
-              <a:t> month — different from the 30-day </a:t>
-            </a:r>
-            <a:pPr algn="l" indent="0" marL="0">
-              <a:lnSpc>
-                <a:spcPts val="1680"/>
-              </a:lnSpc>
-              <a:spcBef>
-                <a:spcPts val="300"/>
-              </a:spcBef>
-              <a:spcAft>
-                <a:spcPts val="300"/>
-              </a:spcAft>
-              <a:buNone/>
-            </a:pPr>
-            <a:r>
-              <a:rPr lang="en-US" sz="1200" i="1" dirty="0">
-                <a:solidFill>
-                  <a:srgbClr val="2C2C2C"/>
-                </a:solidFill>
-                <a:latin typeface="Verdana" pitchFamily="34" charset="0"/>
-                <a:ea typeface="Verdana" pitchFamily="34" charset="-122"/>
-                <a:cs typeface="Verdana" pitchFamily="34" charset="-120"/>
-              </a:rPr>
-              <a:t>synodic</a:t>
-            </a:r>
-            <a:pPr algn="l" indent="0" marL="0">
-              <a:lnSpc>
-                <a:spcPts val="1680"/>
-              </a:lnSpc>
-              <a:spcBef>
-                <a:spcPts val="300"/>
-              </a:spcBef>
-              <a:spcAft>
-                <a:spcPts val="300"/>
-              </a:spcAft>
-              <a:buNone/>
-            </a:pPr>
-            <a:r>
-              <a:rPr lang="en-US" sz="1200" dirty="0">
-                <a:solidFill>
-                  <a:srgbClr val="2C2C2C"/>
-                </a:solidFill>
-                <a:latin typeface="Verdana" pitchFamily="34" charset="0"/>
-                <a:ea typeface="Verdana" pitchFamily="34" charset="-122"/>
-                <a:cs typeface="Verdana" pitchFamily="34" charset="-120"/>
-              </a:rPr>
-              <a:t> month, but we don't need that distinction yet). – If a child asks "why don't the houses come back to the same place every 30 nights?" — that's a great question, and you can tell them they'll learn about it in Middle school. (The answer: because Earth has moved around the Sun during the 27 days too.) – Some children may know specific nakṣatras from their birth chart. That's fine — let them share, but don't dwell on astrology.</a:t>
+              <a:t> Just draw the Moon and one house. The story is the lesson — the drawing supports it.</a:t>
             </a:r>
             <a:endParaRPr lang="en-US" sz="1200" dirty="0"/>
           </a:p>
